--- a/submission/SIH2026_SIH26153_KALACHAKRA_idea.pptx
+++ b/submission/SIH2026_SIH26153_KALACHAKRA_idea.pptx
@@ -11312,7 +11312,17 @@
                 </a:solidFill>
                 <a:latin typeface="Calibri"/>
               </a:rPr>
-              <a:t>Repository with all experiments, pre-registered predictions and printed verdicts, and one-command reproduction: [REPO URL]</a:t>
+              <a:t>Repository with all experiments, pre-registered predictions and printed verdicts, and one-command reproduction:</a:t>
+            </a:r>
+            <a:r>
+              <a:rPr sz="1000" b="0" u="sng">
+                <a:solidFill>
+                  <a:srgbClr val="2E4A7D"/>
+                </a:solidFill>
+                <a:latin typeface="Calibri"/>
+                <a:hlinkClick r:id="rId4"/>
+              </a:rPr>
+              <a:t>  github.com/AKRai-2005/kalachakra</a:t>
             </a:r>
           </a:p>
         </p:txBody>
